--- a/sjoskolan/vecka-39/aktuell/v39_01_Effekt_och_energi_elev.pptx
+++ b/sjoskolan/vecka-39/aktuell/v39_01_Effekt_och_energi_elev.pptx
@@ -14342,64 +14342,6 @@
       </p:sp>
       <p:sp>
         <p:nvSpPr>
-          <p:cNvPr id="5" name="Källor och lärarstöd finns även i bildanteckningarna.">
-            <a:extLst xmlns:a="http://schemas.openxmlformats.org/drawingml/2006/main">
-              <a:ext uri="{FF2B5EF4-FFF2-40B4-BE49-F238E27FC236}">
-                <a16:creationId xmlns:a16="http://schemas.microsoft.com/office/drawing/2014/main" id="{20D59374-055D-408B-A093-6D3A29FB9B4C}"/>
-              </a:ext>
-            </a:extLst>
-          </p:cNvPr>
-          <p:cNvSpPr>
-            <a:spLocks xmlns:a="http://schemas.openxmlformats.org/drawingml/2006/main" noGrp="1"/>
-          </p:cNvSpPr>
-          <p:nvPr/>
-        </p:nvSpPr>
-        <p:spPr>
-          <a:xfrm xmlns:a="http://schemas.openxmlformats.org/drawingml/2006/main">
-            <a:off x="762000" y="5676900"/>
-            <a:ext cx="7620000" cy="352425"/>
-          </a:xfrm>
-          <a:prstGeom xmlns:a="http://schemas.openxmlformats.org/drawingml/2006/main" prst="rect">
-            <a:avLst/>
-          </a:prstGeom>
-          <a:noFill xmlns:a="http://schemas.openxmlformats.org/drawingml/2006/main"/>
-          <a:ln xmlns:a="http://schemas.openxmlformats.org/drawingml/2006/main" w="0">
-            <a:noFill/>
-          </a:ln>
-        </p:spPr>
-        <p:txBody>
-          <a:bodyPr xmlns:a="http://schemas.openxmlformats.org/drawingml/2006/main" wrap="square" lIns="0" tIns="0" rIns="0" bIns="0" anchor="t">
-            <a:noAutofit/>
-          </a:bodyPr>
-          <a:lstStyle xmlns:a="http://schemas.openxmlformats.org/drawingml/2006/main"/>
-          <a:p xmlns:a="http://schemas.openxmlformats.org/drawingml/2006/main">
-            <a:pPr algn="l">
-              <a:buNone/>
-              <a:defRPr sz="1800" b="0">
-                <a:solidFill>
-                  <a:srgbClr val="111111"/>
-                </a:solidFill>
-                <a:latin typeface="Calibri"/>
-                <a:ea typeface="Calibri"/>
-                <a:cs typeface="Calibri"/>
-              </a:defRPr>
-            </a:pPr>
-            <a:r>
-              <a:rPr sz="1800" b="0">
-                <a:solidFill>
-                  <a:srgbClr val="111111"/>
-                </a:solidFill>
-                <a:latin typeface="Calibri"/>
-                <a:ea typeface="Calibri"/>
-                <a:cs typeface="Calibri"/>
-              </a:rPr>
-              <a:t>Källor och lärarstöd finns även i bildanteckningarna.</a:t>
-            </a:r>
-          </a:p>
-        </p:txBody>
-      </p:sp>
-      <p:sp>
-        <p:nvSpPr>
           <p:cNvPr id="6" name="22">
             <a:extLst xmlns:a="http://schemas.openxmlformats.org/drawingml/2006/main">
               <a:ext uri="{FF2B5EF4-FFF2-40B4-BE49-F238E27FC236}">

--- a/sjoskolan/vecka-39/aktuell/v39_01_Effekt_och_energi_elev.pptx
+++ b/sjoskolan/vecka-39/aktuell/v39_01_Effekt_och_energi_elev.pptx
@@ -3956,7 +3956,7 @@
                 <a:ea typeface="Calibri"/>
                 <a:cs typeface="Calibri"/>
               </a:rPr>
-              <a:t>Förutsättningar: Likström med konstant 24 V och 3,0 A. Tillförd effekt avser elen som pumpen tar emot.</a:t>
+              <a:t>Förutsättningar: Likström med konstant 24 V och 3,0 A. Tillförd effekt är den elektriska effekt pumpen tar emot.</a:t>
             </a:r>
           </a:p>
         </p:txBody>
@@ -4013,7 +4013,7 @@
                 <a:ea typeface="Calibri"/>
                 <a:cs typeface="Calibri"/>
               </a:rPr>
-              <a:t>Arbetsgång: Multiplicera spänning och ström. Kontrollera att enheten blir V · A = W.</a:t>
+              <a:t>Arbetsgång: Multiplicera spänningen med strömmen. Kontrollera att enheten blir V · A = W.</a:t>
             </a:r>
           </a:p>
         </p:txBody>
@@ -4566,7 +4566,7 @@
                 <a:ea typeface="Calibri"/>
                 <a:cs typeface="Calibri"/>
               </a:rPr>
-              <a:t>E = P · t     t[h] = t[min]/60</a:t>
+              <a:t>E = P · t; t[h] = t[min]/60</a:t>
             </a:r>
           </a:p>
         </p:txBody>
@@ -4680,7 +4680,7 @@
                 <a:ea typeface="Calibri"/>
                 <a:cs typeface="Calibri"/>
               </a:rPr>
-              <a:t>Förutsättningar: Effekten 1,5 kW är konstant under alla 40 minuter.</a:t>
+              <a:t>Förutsättningar: Effekten är 1,5 kW under hela tiden.</a:t>
             </a:r>
           </a:p>
         </p:txBody>
@@ -4737,7 +4737,7 @@
                 <a:ea typeface="Calibri"/>
                 <a:cs typeface="Calibri"/>
               </a:rPr>
-              <a:t>Arbetsgång: Omvandla tiden till timmar först. Multiplicera sedan med effekten.</a:t>
+              <a:t>Arbetsgång: Gör först om tiden till timmar och multiplicera sedan med effekten.</a:t>
             </a:r>
           </a:p>
         </p:txBody>
@@ -5290,7 +5290,51 @@
                 <a:ea typeface="Calibri"/>
                 <a:cs typeface="Calibri"/>
               </a:rPr>
-              <a:t>Etotal = E₁ + E₂     Egrupp = antal · P · t</a:t>
+              <a:t>Etotal = E</a:t>
+            </a:r>
+            <a:r>
+              <a:rPr sz="2400" b="1" baseline="-25000">
+                <a:solidFill>
+                  <a:srgbClr val="064F91"/>
+                </a:solidFill>
+                <a:latin typeface="Calibri"/>
+                <a:ea typeface="Calibri"/>
+                <a:cs typeface="Calibri"/>
+              </a:rPr>
+              <a:t>1</a:t>
+            </a:r>
+            <a:r>
+              <a:rPr sz="2400" b="1">
+                <a:solidFill>
+                  <a:srgbClr val="064F91"/>
+                </a:solidFill>
+                <a:latin typeface="Calibri"/>
+                <a:ea typeface="Calibri"/>
+                <a:cs typeface="Calibri"/>
+              </a:rPr>
+              <a:t> + E</a:t>
+            </a:r>
+            <a:r>
+              <a:rPr sz="2400" b="1" baseline="-25000">
+                <a:solidFill>
+                  <a:srgbClr val="064F91"/>
+                </a:solidFill>
+                <a:latin typeface="Calibri"/>
+                <a:ea typeface="Calibri"/>
+                <a:cs typeface="Calibri"/>
+              </a:rPr>
+              <a:t>2</a:t>
+            </a:r>
+            <a:r>
+              <a:rPr sz="2400" b="1">
+                <a:solidFill>
+                  <a:srgbClr val="064F91"/>
+                </a:solidFill>
+                <a:latin typeface="Calibri"/>
+                <a:ea typeface="Calibri"/>
+                <a:cs typeface="Calibri"/>
+              </a:rPr>
+              <a:t>; Egrupp = antal · P · t</a:t>
             </a:r>
           </a:p>
         </p:txBody>
@@ -5404,7 +5448,7 @@
                 <a:ea typeface="Calibri"/>
                 <a:cs typeface="Calibri"/>
               </a:rPr>
-              <a:t>Förutsättningar: Alla lampor drar angiven effekt under respektive drifttid. Två 60 W-lampor räknas två gånger.</a:t>
+              <a:t>Förutsättningar: Varje lampa drar sin märkeffekt under hela sin drifttid. Det finns två 60 W-lampor.</a:t>
             </a:r>
           </a:p>
         </p:txBody>
@@ -5461,7 +5505,7 @@
                 <a:ea typeface="Calibri"/>
                 <a:cs typeface="Calibri"/>
               </a:rPr>
-              <a:t>Arbetsgång: Beräkna varje grupps energi. Summera i Wh och dividera sedan med 1 000.</a:t>
+              <a:t>Arbetsgång: Räkna energin för varje grupp, lägg ihop i Wh och dela med 1 000 för att få kWh.</a:t>
             </a:r>
           </a:p>
         </p:txBody>
@@ -6014,7 +6058,84 @@
                 <a:ea typeface="Calibri"/>
                 <a:cs typeface="Calibri"/>
               </a:rPr>
-              <a:t>Pᵢₙ = Pᵤₜ/η     Pförlust = Pᵢₙ − Pᵤₜ</a:t>
+              <a:t>P</a:t>
+            </a:r>
+            <a:r>
+              <a:rPr sz="2400" b="1" baseline="-25000">
+                <a:solidFill>
+                  <a:srgbClr val="064F91"/>
+                </a:solidFill>
+                <a:latin typeface="Calibri"/>
+                <a:ea typeface="Calibri"/>
+                <a:cs typeface="Calibri"/>
+              </a:rPr>
+              <a:t>in</a:t>
+            </a:r>
+            <a:r>
+              <a:rPr sz="2400" b="1">
+                <a:solidFill>
+                  <a:srgbClr val="064F91"/>
+                </a:solidFill>
+                <a:latin typeface="Calibri"/>
+                <a:ea typeface="Calibri"/>
+                <a:cs typeface="Calibri"/>
+              </a:rPr>
+              <a:t> = P</a:t>
+            </a:r>
+            <a:r>
+              <a:rPr sz="2400" b="1" baseline="-25000">
+                <a:solidFill>
+                  <a:srgbClr val="064F91"/>
+                </a:solidFill>
+                <a:latin typeface="Calibri"/>
+                <a:ea typeface="Calibri"/>
+                <a:cs typeface="Calibri"/>
+              </a:rPr>
+              <a:t>ut</a:t>
+            </a:r>
+            <a:r>
+              <a:rPr sz="2400" b="1">
+                <a:solidFill>
+                  <a:srgbClr val="064F91"/>
+                </a:solidFill>
+                <a:latin typeface="Calibri"/>
+                <a:ea typeface="Calibri"/>
+                <a:cs typeface="Calibri"/>
+              </a:rPr>
+              <a:t>/η; Pförlust = P</a:t>
+            </a:r>
+            <a:r>
+              <a:rPr sz="2400" b="1" baseline="-25000">
+                <a:solidFill>
+                  <a:srgbClr val="064F91"/>
+                </a:solidFill>
+                <a:latin typeface="Calibri"/>
+                <a:ea typeface="Calibri"/>
+                <a:cs typeface="Calibri"/>
+              </a:rPr>
+              <a:t>in</a:t>
+            </a:r>
+            <a:r>
+              <a:rPr sz="2400" b="1">
+                <a:solidFill>
+                  <a:srgbClr val="064F91"/>
+                </a:solidFill>
+                <a:latin typeface="Calibri"/>
+                <a:ea typeface="Calibri"/>
+                <a:cs typeface="Calibri"/>
+              </a:rPr>
+              <a:t> − P</a:t>
+            </a:r>
+            <a:r>
+              <a:rPr sz="2400" b="1" baseline="-25000">
+                <a:solidFill>
+                  <a:srgbClr val="064F91"/>
+                </a:solidFill>
+                <a:latin typeface="Calibri"/>
+                <a:ea typeface="Calibri"/>
+                <a:cs typeface="Calibri"/>
+              </a:rPr>
+              <a:t>ut</a:t>
             </a:r>
           </a:p>
         </p:txBody>
@@ -6071,7 +6192,51 @@
                 <a:ea typeface="Calibri"/>
                 <a:cs typeface="Calibri"/>
               </a:rPr>
-              <a:t>η är verkningsgrad som decimaltal. Pᵤₜ är mekanisk uteffekt och Pᵢₙ elektrisk inmatning.</a:t>
+              <a:t>η skrivs som decimaltal. P</a:t>
+            </a:r>
+            <a:r>
+              <a:rPr sz="2100" b="0" baseline="-25000">
+                <a:solidFill>
+                  <a:srgbClr val="111111"/>
+                </a:solidFill>
+                <a:latin typeface="Calibri"/>
+                <a:ea typeface="Calibri"/>
+                <a:cs typeface="Calibri"/>
+              </a:rPr>
+              <a:t>ut</a:t>
+            </a:r>
+            <a:r>
+              <a:rPr sz="2100" b="0">
+                <a:solidFill>
+                  <a:srgbClr val="111111"/>
+                </a:solidFill>
+                <a:latin typeface="Calibri"/>
+                <a:ea typeface="Calibri"/>
+                <a:cs typeface="Calibri"/>
+              </a:rPr>
+              <a:t> är effekten på axeln och P</a:t>
+            </a:r>
+            <a:r>
+              <a:rPr sz="2100" b="0" baseline="-25000">
+                <a:solidFill>
+                  <a:srgbClr val="111111"/>
+                </a:solidFill>
+                <a:latin typeface="Calibri"/>
+                <a:ea typeface="Calibri"/>
+                <a:cs typeface="Calibri"/>
+              </a:rPr>
+              <a:t>in</a:t>
+            </a:r>
+            <a:r>
+              <a:rPr sz="2100" b="0">
+                <a:solidFill>
+                  <a:srgbClr val="111111"/>
+                </a:solidFill>
+                <a:latin typeface="Calibri"/>
+                <a:ea typeface="Calibri"/>
+                <a:cs typeface="Calibri"/>
+              </a:rPr>
+              <a:t> den tillförda elektriska effekten.</a:t>
             </a:r>
           </a:p>
         </p:txBody>
@@ -6128,7 +6293,7 @@
                 <a:ea typeface="Calibri"/>
                 <a:cs typeface="Calibri"/>
               </a:rPr>
-              <a:t>Förutsättningar: η = 75 % = 0,75. Motorn arbetar konstant vid den angivna belastningen.</a:t>
+              <a:t>Förutsättningar: η = 75 % = 0,75. Motorn går med jämn belastning.</a:t>
             </a:r>
           </a:p>
         </p:txBody>
@@ -6185,7 +6350,7 @@
                 <a:ea typeface="Calibri"/>
                 <a:cs typeface="Calibri"/>
               </a:rPr>
-              <a:t>Arbetsgång: Dividera uteffekten med verkningsgraden. Subtrahera sedan uteffekten från inmatningen.</a:t>
+              <a:t>Arbetsgång: Dela uteffekten med verkningsgraden och dra sedan bort uteffekten från den tillförda effekten.</a:t>
             </a:r>
           </a:p>
         </p:txBody>
@@ -6462,7 +6627,7 @@
                 <a:ea typeface="Calibri"/>
                 <a:cs typeface="Calibri"/>
               </a:rPr>
-              <a:t>En motor ger 600 W mekanisk effekt. Verkningsgraden är 75 %. Beräkna elektrisk inmatning och förlust.</a:t>
+              <a:t>En motor ger 600 W mekanisk effekt. Verkningsgraden är 75 %. Beräkna den tillförda elektriska effekten och förlusten.</a:t>
             </a:r>
           </a:p>
         </p:txBody>
@@ -6738,7 +6903,7 @@
                 <a:ea typeface="Calibri"/>
                 <a:cs typeface="Calibri"/>
               </a:rPr>
-              <a:t>I = U/R     P = U · I = U²/R</a:t>
+              <a:t>I = U/R; P = U · I = U²/R</a:t>
             </a:r>
           </a:p>
         </p:txBody>
@@ -6795,7 +6960,7 @@
                 <a:ea typeface="Calibri"/>
                 <a:cs typeface="Calibri"/>
               </a:rPr>
-              <a:t>R är resistans i Ω. Samma U och I ska avse samma resistor.</a:t>
+              <a:t>R är resistans i Ω.</a:t>
             </a:r>
           </a:p>
         </p:txBody>
@@ -6852,7 +7017,7 @@
                 <a:ea typeface="Calibri"/>
                 <a:cs typeface="Calibri"/>
               </a:rPr>
-              <a:t>Förutsättningar: Ohmsk resistor med konstant R = 12 Ω. Källan håller 24 V över resistorn.</a:t>
+              <a:t>Förutsättningar: Resistor med konstant R = 12 Ω. Källan håller 24 V över resistorn.</a:t>
             </a:r>
           </a:p>
         </p:txBody>
@@ -6909,7 +7074,7 @@
                 <a:ea typeface="Calibri"/>
                 <a:cs typeface="Calibri"/>
               </a:rPr>
-              <a:t>Arbetsgång: Beräkna I med Ohms lag. Använd därefter I för att beräkna effekten.</a:t>
+              <a:t>Arbetsgång: Räkna strömmen med Ohms lag och använd den sedan för att räkna effekten.</a:t>
             </a:r>
           </a:p>
         </p:txBody>
@@ -9792,7 +9957,7 @@
                 <a:ea typeface="Calibri"/>
                 <a:cs typeface="Calibri"/>
               </a:rPr>
-              <a:t>R = ρ · ltotal/A     ltotal = 2 · lenkel</a:t>
+              <a:t>R = ρ · ltotal/A; ltotal = 2 · lenkel</a:t>
             </a:r>
           </a:p>
         </p:txBody>
@@ -9963,7 +10128,7 @@
                 <a:ea typeface="Calibri"/>
                 <a:cs typeface="Calibri"/>
               </a:rPr>
-              <a:t>Arbetsgång: Summera fram- och återledarens längd. Sätt in total längd och arean 2,5 mm².</a:t>
+              <a:t>Arbetsgång: Lägg ihop fram- och återledarens längd. Sätt in den totala längden och arean 2,5 mm².</a:t>
             </a:r>
           </a:p>
         </p:txBody>
@@ -10516,7 +10681,51 @@
                 <a:ea typeface="Calibri"/>
                 <a:cs typeface="Calibri"/>
               </a:rPr>
-              <a:t>ΔU = I · R     Ulast = Ukälla − ΔU</a:t>
+              <a:t>ΔU = I · R; U</a:t>
+            </a:r>
+            <a:r>
+              <a:rPr sz="2400" b="1" baseline="-25000">
+                <a:solidFill>
+                  <a:srgbClr val="064F91"/>
+                </a:solidFill>
+                <a:latin typeface="Calibri"/>
+                <a:ea typeface="Calibri"/>
+                <a:cs typeface="Calibri"/>
+              </a:rPr>
+              <a:t>last</a:t>
+            </a:r>
+            <a:r>
+              <a:rPr sz="2400" b="1">
+                <a:solidFill>
+                  <a:srgbClr val="064F91"/>
+                </a:solidFill>
+                <a:latin typeface="Calibri"/>
+                <a:ea typeface="Calibri"/>
+                <a:cs typeface="Calibri"/>
+              </a:rPr>
+              <a:t> = U</a:t>
+            </a:r>
+            <a:r>
+              <a:rPr sz="2400" b="1" baseline="-25000">
+                <a:solidFill>
+                  <a:srgbClr val="064F91"/>
+                </a:solidFill>
+                <a:latin typeface="Calibri"/>
+                <a:ea typeface="Calibri"/>
+                <a:cs typeface="Calibri"/>
+              </a:rPr>
+              <a:t>källa</a:t>
+            </a:r>
+            <a:r>
+              <a:rPr sz="2400" b="1">
+                <a:solidFill>
+                  <a:srgbClr val="064F91"/>
+                </a:solidFill>
+                <a:latin typeface="Calibri"/>
+                <a:ea typeface="Calibri"/>
+                <a:cs typeface="Calibri"/>
+              </a:rPr>
+              <a:t> − ΔU</a:t>
             </a:r>
           </a:p>
           <a:p xmlns:a="http://schemas.openxmlformats.org/drawingml/2006/main">
@@ -10539,7 +10748,18 @@
                 <a:ea typeface="Calibri"/>
                 <a:cs typeface="Calibri"/>
               </a:rPr>
-              <a:t>Fall i % = 100 · ΔU/Ukälla</a:t>
+              <a:t>Fall i % = 100 · ΔU/U</a:t>
+            </a:r>
+            <a:r>
+              <a:rPr sz="2400" b="1" baseline="-25000">
+                <a:solidFill>
+                  <a:srgbClr val="064F91"/>
+                </a:solidFill>
+                <a:latin typeface="Calibri"/>
+                <a:ea typeface="Calibri"/>
+                <a:cs typeface="Calibri"/>
+              </a:rPr>
+              <a:t>källa</a:t>
             </a:r>
           </a:p>
         </p:txBody>
@@ -10596,7 +10816,7 @@
                 <a:ea typeface="Calibri"/>
                 <a:cs typeface="Calibri"/>
               </a:rPr>
-              <a:t>ΔU är kabelslingans spänningsfall. Procenttalet jämför fallet med källans 24 V.</a:t>
+              <a:t>ΔU är kabelslingans spänningsfall.</a:t>
             </a:r>
           </a:p>
         </p:txBody>
@@ -10653,7 +10873,7 @@
                 <a:ea typeface="Calibri"/>
                 <a:cs typeface="Calibri"/>
               </a:rPr>
-              <a:t>Förutsättningar: R = 0,140 Ω gäller hela slingan. Strömmen hålls vid 5,0 A.</a:t>
+              <a:t>Förutsättningar: R = 0,140 Ω gäller hela slingan. Strömmen är 5,0 A.</a:t>
             </a:r>
           </a:p>
         </p:txBody>
@@ -10710,7 +10930,7 @@
                 <a:ea typeface="Calibri"/>
                 <a:cs typeface="Calibri"/>
               </a:rPr>
-              <a:t>Arbetsgång: Beräkna kabelns fall, dra det från källspänningen och beräkna andelen av 24 V.</a:t>
+              <a:t>Arbetsgång: Räkna kabelns spänningsfall, dra det från källans 24 V och räkna ut hur stor andel av 24 V fallet är.</a:t>
             </a:r>
           </a:p>
         </p:txBody>
@@ -10987,7 +11207,7 @@
                 <a:ea typeface="Calibri"/>
                 <a:cs typeface="Calibri"/>
               </a:rPr>
-              <a:t>Källan ger 24 V. Kabelslingan har R = 0,140 Ω och lasten tar 5,0 A. Beräkna spänning vid lasten och procentuellt fall.</a:t>
+              <a:t>Källan ger 24 V. Kabelslingan har R = 0,140 Ω och lasten tar 5,0 A. Beräkna spänningen vid lasten och spänningsfallet i procent.</a:t>
             </a:r>
           </a:p>
         </p:txBody>
@@ -11263,7 +11483,95 @@
                 <a:ea typeface="Calibri"/>
                 <a:cs typeface="Calibri"/>
               </a:rPr>
-              <a:t>Pförlust = I²R     P₂/P₁ = (I₂/I₁)²</a:t>
+              <a:t>Pförlust = I² · R; P</a:t>
+            </a:r>
+            <a:r>
+              <a:rPr sz="2400" b="1" baseline="-25000">
+                <a:solidFill>
+                  <a:srgbClr val="064F91"/>
+                </a:solidFill>
+                <a:latin typeface="Calibri"/>
+                <a:ea typeface="Calibri"/>
+                <a:cs typeface="Calibri"/>
+              </a:rPr>
+              <a:t>2</a:t>
+            </a:r>
+            <a:r>
+              <a:rPr sz="2400" b="1">
+                <a:solidFill>
+                  <a:srgbClr val="064F91"/>
+                </a:solidFill>
+                <a:latin typeface="Calibri"/>
+                <a:ea typeface="Calibri"/>
+                <a:cs typeface="Calibri"/>
+              </a:rPr>
+              <a:t>/P</a:t>
+            </a:r>
+            <a:r>
+              <a:rPr sz="2400" b="1" baseline="-25000">
+                <a:solidFill>
+                  <a:srgbClr val="064F91"/>
+                </a:solidFill>
+                <a:latin typeface="Calibri"/>
+                <a:ea typeface="Calibri"/>
+                <a:cs typeface="Calibri"/>
+              </a:rPr>
+              <a:t>1</a:t>
+            </a:r>
+            <a:r>
+              <a:rPr sz="2400" b="1">
+                <a:solidFill>
+                  <a:srgbClr val="064F91"/>
+                </a:solidFill>
+                <a:latin typeface="Calibri"/>
+                <a:ea typeface="Calibri"/>
+                <a:cs typeface="Calibri"/>
+              </a:rPr>
+              <a:t> = (I</a:t>
+            </a:r>
+            <a:r>
+              <a:rPr sz="2400" b="1" baseline="-25000">
+                <a:solidFill>
+                  <a:srgbClr val="064F91"/>
+                </a:solidFill>
+                <a:latin typeface="Calibri"/>
+                <a:ea typeface="Calibri"/>
+                <a:cs typeface="Calibri"/>
+              </a:rPr>
+              <a:t>2</a:t>
+            </a:r>
+            <a:r>
+              <a:rPr sz="2400" b="1">
+                <a:solidFill>
+                  <a:srgbClr val="064F91"/>
+                </a:solidFill>
+                <a:latin typeface="Calibri"/>
+                <a:ea typeface="Calibri"/>
+                <a:cs typeface="Calibri"/>
+              </a:rPr>
+              <a:t>/I</a:t>
+            </a:r>
+            <a:r>
+              <a:rPr sz="2400" b="1" baseline="-25000">
+                <a:solidFill>
+                  <a:srgbClr val="064F91"/>
+                </a:solidFill>
+                <a:latin typeface="Calibri"/>
+                <a:ea typeface="Calibri"/>
+                <a:cs typeface="Calibri"/>
+              </a:rPr>
+              <a:t>1</a:t>
+            </a:r>
+            <a:r>
+              <a:rPr sz="2400" b="1">
+                <a:solidFill>
+                  <a:srgbClr val="064F91"/>
+                </a:solidFill>
+                <a:latin typeface="Calibri"/>
+                <a:ea typeface="Calibri"/>
+                <a:cs typeface="Calibri"/>
+              </a:rPr>
+              <a:t>)²</a:t>
             </a:r>
           </a:p>
         </p:txBody>
@@ -11434,7 +11742,7 @@
                 <a:ea typeface="Calibri"/>
                 <a:cs typeface="Calibri"/>
               </a:rPr>
-              <a:t>Arbetsgång: Räkna båda förlusterna och dividera den nya med den gamla.</a:t>
+              <a:t>Arbetsgång: Räkna ut båda förlusterna och dela den nya med den gamla.</a:t>
             </a:r>
           </a:p>
         </p:txBody>
@@ -12501,7 +12809,62 @@
                 <a:ea typeface="Calibri"/>
                 <a:cs typeface="Calibri"/>
               </a:rPr>
-              <a:t>Rmax = ΔUmax/I     Amin = ρ · 2l/Rmax</a:t>
+              <a:t>R</a:t>
+            </a:r>
+            <a:r>
+              <a:rPr sz="2400" b="1" baseline="-25000">
+                <a:solidFill>
+                  <a:srgbClr val="064F91"/>
+                </a:solidFill>
+                <a:latin typeface="Calibri"/>
+                <a:ea typeface="Calibri"/>
+                <a:cs typeface="Calibri"/>
+              </a:rPr>
+              <a:t>max</a:t>
+            </a:r>
+            <a:r>
+              <a:rPr sz="2400" b="1">
+                <a:solidFill>
+                  <a:srgbClr val="064F91"/>
+                </a:solidFill>
+                <a:latin typeface="Calibri"/>
+                <a:ea typeface="Calibri"/>
+                <a:cs typeface="Calibri"/>
+              </a:rPr>
+              <a:t> = ΔU</a:t>
+            </a:r>
+            <a:r>
+              <a:rPr sz="2400" b="1" baseline="-25000">
+                <a:solidFill>
+                  <a:srgbClr val="064F91"/>
+                </a:solidFill>
+                <a:latin typeface="Calibri"/>
+                <a:ea typeface="Calibri"/>
+                <a:cs typeface="Calibri"/>
+              </a:rPr>
+              <a:t>max</a:t>
+            </a:r>
+            <a:r>
+              <a:rPr sz="2400" b="1">
+                <a:solidFill>
+                  <a:srgbClr val="064F91"/>
+                </a:solidFill>
+                <a:latin typeface="Calibri"/>
+                <a:ea typeface="Calibri"/>
+                <a:cs typeface="Calibri"/>
+              </a:rPr>
+              <a:t>/I; Amin = ρ · 2l/R</a:t>
+            </a:r>
+            <a:r>
+              <a:rPr sz="2400" b="1" baseline="-25000">
+                <a:solidFill>
+                  <a:srgbClr val="064F91"/>
+                </a:solidFill>
+                <a:latin typeface="Calibri"/>
+                <a:ea typeface="Calibri"/>
+                <a:cs typeface="Calibri"/>
+              </a:rPr>
+              <a:t>max</a:t>
             </a:r>
           </a:p>
         </p:txBody>
@@ -12558,7 +12921,7 @@
                 <a:ea typeface="Calibri"/>
                 <a:cs typeface="Calibri"/>
               </a:rPr>
-              <a:t>l är enkel kabellängd i m. Amin anges i mm². ρ = 0,0175 Ω·mm²/m för koppar vid 20 °C.</a:t>
+              <a:t>l är kabelns längd enkel väg i m, och Amin blir i mm². ρ = 0,0175 Ω·mm²/m för koppar vid 20 °C.</a:t>
             </a:r>
           </a:p>
         </p:txBody>
@@ -12672,7 +13035,7 @@
                 <a:ea typeface="Calibri"/>
                 <a:cs typeface="Calibri"/>
               </a:rPr>
-              <a:t>Arbetsgång: Beräkna högsta slingresistans. Lös sedan ut arean. Övningen prövar bara spänningsfallskravet.</a:t>
+              <a:t>Arbetsgång: Räkna ut den största tillåtna slingresistansen och lös sedan ut arean. Uppgiften gäller bara kravet på spänningsfall.</a:t>
             </a:r>
           </a:p>
         </p:txBody>
@@ -12949,7 +13312,7 @@
                 <a:ea typeface="Calibri"/>
                 <a:cs typeface="Calibri"/>
               </a:rPr>
-              <a:t>En 24 V-last tar 8 A. Enkel kabellängd är 12 m. Högst 0,8 V fall tillåts i uppgiften. Beräkna minsta area vid 20 °C.</a:t>
+              <a:t>En 24 V-last tar 8 A. Kabeln är 12 m lång, enkel väg. Spänningsfallet får vara högst 0,8 V. Beräkna minsta area vid 20 °C.</a:t>
             </a:r>
           </a:p>
         </p:txBody>
@@ -13225,7 +13588,73 @@
                 <a:ea typeface="Calibri"/>
                 <a:cs typeface="Calibri"/>
               </a:rPr>
-              <a:t>Pᵢₙ = Pᵤₜ/η     E = Pᵢₙt</a:t>
+              <a:t>P</a:t>
+            </a:r>
+            <a:r>
+              <a:rPr sz="2400" b="1" baseline="-25000">
+                <a:solidFill>
+                  <a:srgbClr val="064F91"/>
+                </a:solidFill>
+                <a:latin typeface="Calibri"/>
+                <a:ea typeface="Calibri"/>
+                <a:cs typeface="Calibri"/>
+              </a:rPr>
+              <a:t>in</a:t>
+            </a:r>
+            <a:r>
+              <a:rPr sz="2400" b="1">
+                <a:solidFill>
+                  <a:srgbClr val="064F91"/>
+                </a:solidFill>
+                <a:latin typeface="Calibri"/>
+                <a:ea typeface="Calibri"/>
+                <a:cs typeface="Calibri"/>
+              </a:rPr>
+              <a:t> = P</a:t>
+            </a:r>
+            <a:r>
+              <a:rPr sz="2400" b="1" baseline="-25000">
+                <a:solidFill>
+                  <a:srgbClr val="064F91"/>
+                </a:solidFill>
+                <a:latin typeface="Calibri"/>
+                <a:ea typeface="Calibri"/>
+                <a:cs typeface="Calibri"/>
+              </a:rPr>
+              <a:t>ut</a:t>
+            </a:r>
+            <a:r>
+              <a:rPr sz="2400" b="1">
+                <a:solidFill>
+                  <a:srgbClr val="064F91"/>
+                </a:solidFill>
+                <a:latin typeface="Calibri"/>
+                <a:ea typeface="Calibri"/>
+                <a:cs typeface="Calibri"/>
+              </a:rPr>
+              <a:t>/η; E = P</a:t>
+            </a:r>
+            <a:r>
+              <a:rPr sz="2400" b="1" baseline="-25000">
+                <a:solidFill>
+                  <a:srgbClr val="064F91"/>
+                </a:solidFill>
+                <a:latin typeface="Calibri"/>
+                <a:ea typeface="Calibri"/>
+                <a:cs typeface="Calibri"/>
+              </a:rPr>
+              <a:t>in</a:t>
+            </a:r>
+            <a:r>
+              <a:rPr sz="2400" b="1">
+                <a:solidFill>
+                  <a:srgbClr val="064F91"/>
+                </a:solidFill>
+                <a:latin typeface="Calibri"/>
+                <a:ea typeface="Calibri"/>
+                <a:cs typeface="Calibri"/>
+              </a:rPr>
+              <a:t> · t</a:t>
             </a:r>
           </a:p>
           <a:p xmlns:a="http://schemas.openxmlformats.org/drawingml/2006/main">
@@ -13248,7 +13677,29 @@
                 <a:ea typeface="Calibri"/>
                 <a:cs typeface="Calibri"/>
               </a:rPr>
-              <a:t>I = Pᵢₙ/U     Q = I · t</a:t>
+              <a:t>I = P</a:t>
+            </a:r>
+            <a:r>
+              <a:rPr sz="2400" b="1" baseline="-25000">
+                <a:solidFill>
+                  <a:srgbClr val="064F91"/>
+                </a:solidFill>
+                <a:latin typeface="Calibri"/>
+                <a:ea typeface="Calibri"/>
+                <a:cs typeface="Calibri"/>
+              </a:rPr>
+              <a:t>in</a:t>
+            </a:r>
+            <a:r>
+              <a:rPr sz="2400" b="1">
+                <a:solidFill>
+                  <a:srgbClr val="064F91"/>
+                </a:solidFill>
+                <a:latin typeface="Calibri"/>
+                <a:ea typeface="Calibri"/>
+                <a:cs typeface="Calibri"/>
+              </a:rPr>
+              <a:t>/U; Q = I · t</a:t>
             </a:r>
           </a:p>
         </p:txBody>
@@ -13305,7 +13756,7 @@
                 <a:ea typeface="Calibri"/>
                 <a:cs typeface="Calibri"/>
               </a:rPr>
-              <a:t>E fås i Wh med W och h. Q är laddningsbehov i Ah med A och h. η anges som decimal.</a:t>
+              <a:t>Med W och h får du E i Wh, och med A och h får du Q i Ah. Skriv η som decimaltal.</a:t>
             </a:r>
           </a:p>
         </p:txBody>
@@ -13362,7 +13813,7 @@
                 <a:ea typeface="Calibri"/>
                 <a:cs typeface="Calibri"/>
               </a:rPr>
-              <a:t>Förutsättningar: Konstant 24 V och 120 W uteffekt under 2 h. η = 0,80. Ingen batterireserv ingår i modellen.</a:t>
+              <a:t>Förutsättningar: Konstant 24 V och 120 W uteffekt under 2 h. η = 0,80. Ingen marginal i batteriet är medräknad.</a:t>
             </a:r>
           </a:p>
         </p:txBody>
@@ -13419,7 +13870,7 @@
                 <a:ea typeface="Calibri"/>
                 <a:cs typeface="Calibri"/>
               </a:rPr>
-              <a:t>Arbetsgång: Räkna inmatning, energi och ström i tur och ordning. Beräkna sist Ah, som är en annan storhet än Wh.</a:t>
+              <a:t>Arbetsgång: Räkna i tur och ordning tillförd effekt, energi och ström, och sist Ah – en annan storhet än Wh.</a:t>
             </a:r>
           </a:p>
         </p:txBody>
@@ -13696,7 +14147,7 @@
                 <a:ea typeface="Calibri"/>
                 <a:cs typeface="Calibri"/>
               </a:rPr>
-              <a:t>En 24 V-pump ger 120 W mekaniskt med η = 80 %. Den går i 2 h. Beräkna inmatad energi och laddningsbehov i Ah.</a:t>
+              <a:t>En 24 V-pump ger 120 W mekaniskt med η = 80 %. Den går i 2 h. Beräkna den tillförda energin och hur många Ah som går åt.</a:t>
             </a:r>
           </a:p>
         </p:txBody>

--- a/sjoskolan/vecka-39/aktuell/v39_01_Effekt_och_energi_elev.pptx
+++ b/sjoskolan/vecka-39/aktuell/v39_01_Effekt_och_energi_elev.pptx
@@ -3512,6 +3512,10 @@
             <a:noFill/>
           </a:ln>
         </p:spPr>
+        <p:txBody xmlns:a="http://schemas.openxmlformats.org/drawingml/2006/main">
+          <a:bodyPr/>
+          <a:p/>
+        </p:txBody>
       </p:sp>
       <p:sp>
         <p:nvSpPr>
@@ -6102,7 +6106,29 @@
                 <a:ea typeface="Calibri"/>
                 <a:cs typeface="Calibri"/>
               </a:rPr>
-              <a:t>/η; Pförlust = P</a:t>
+              <a:t>/η; P</a:t>
+            </a:r>
+            <a:r>
+              <a:rPr sz="2400" b="1" baseline="-25000">
+                <a:solidFill>
+                  <a:srgbClr val="064F91"/>
+                </a:solidFill>
+                <a:latin typeface="Calibri"/>
+                <a:ea typeface="Calibri"/>
+                <a:cs typeface="Calibri"/>
+              </a:rPr>
+              <a:t>förlust</a:t>
+            </a:r>
+            <a:r>
+              <a:rPr sz="2400" b="1">
+                <a:solidFill>
+                  <a:srgbClr val="064F91"/>
+                </a:solidFill>
+                <a:latin typeface="Calibri"/>
+                <a:ea typeface="Calibri"/>
+                <a:cs typeface="Calibri"/>
+              </a:rPr>
+              <a:t> = P</a:t>
             </a:r>
             <a:r>
               <a:rPr sz="2400" b="1" baseline="-25000">
@@ -8839,7 +8865,29 @@
                 <a:ea typeface="Calibri"/>
                 <a:cs typeface="Calibri"/>
               </a:rPr>
-              <a:t>ΔU = I · R     Pförlust = I² · R</a:t>
+              <a:t>ΔU = I · R     P</a:t>
+            </a:r>
+            <a:r>
+              <a:rPr sz="2925" b="1" baseline="-25000">
+                <a:solidFill>
+                  <a:srgbClr val="064F91"/>
+                </a:solidFill>
+                <a:latin typeface="Calibri"/>
+                <a:ea typeface="Calibri"/>
+                <a:cs typeface="Calibri"/>
+              </a:rPr>
+              <a:t>förlust</a:t>
+            </a:r>
+            <a:r>
+              <a:rPr sz="2925" b="1">
+                <a:solidFill>
+                  <a:srgbClr val="064F91"/>
+                </a:solidFill>
+                <a:latin typeface="Calibri"/>
+                <a:ea typeface="Calibri"/>
+                <a:cs typeface="Calibri"/>
+              </a:rPr>
+              <a:t> = I² · R</a:t>
             </a:r>
           </a:p>
         </p:txBody>
@@ -9660,7 +9708,29 @@
                 <a:ea typeface="Calibri"/>
                 <a:cs typeface="Calibri"/>
               </a:rPr>
-              <a:t>2. ΔU = 4 · 0,070 = 0,28 V. Ulast = 24 − 0,28 = 23,72 V.</a:t>
+              <a:t>2. ΔU = 4 · 0,070 = 0,28 V. U</a:t>
+            </a:r>
+            <a:r>
+              <a:rPr sz="2063" b="0" baseline="-25000">
+                <a:solidFill>
+                  <a:srgbClr val="111111"/>
+                </a:solidFill>
+                <a:latin typeface="Calibri"/>
+                <a:ea typeface="Calibri"/>
+                <a:cs typeface="Calibri"/>
+              </a:rPr>
+              <a:t>last</a:t>
+            </a:r>
+            <a:r>
+              <a:rPr sz="2063" b="0">
+                <a:solidFill>
+                  <a:srgbClr val="111111"/>
+                </a:solidFill>
+                <a:latin typeface="Calibri"/>
+                <a:ea typeface="Calibri"/>
+                <a:cs typeface="Calibri"/>
+              </a:rPr>
+              <a:t> = 24 − 0,28 = 23,72 V.</a:t>
             </a:r>
           </a:p>
           <a:p xmlns:a="http://schemas.openxmlformats.org/drawingml/2006/main">
@@ -11483,7 +11553,29 @@
                 <a:ea typeface="Calibri"/>
                 <a:cs typeface="Calibri"/>
               </a:rPr>
-              <a:t>Pförlust = I² · R; P</a:t>
+              <a:t>P</a:t>
+            </a:r>
+            <a:r>
+              <a:rPr sz="2400" b="1" baseline="-25000">
+                <a:solidFill>
+                  <a:srgbClr val="064F91"/>
+                </a:solidFill>
+                <a:latin typeface="Calibri"/>
+                <a:ea typeface="Calibri"/>
+                <a:cs typeface="Calibri"/>
+              </a:rPr>
+              <a:t>förlust</a:t>
+            </a:r>
+            <a:r>
+              <a:rPr sz="2400" b="1">
+                <a:solidFill>
+                  <a:srgbClr val="064F91"/>
+                </a:solidFill>
+                <a:latin typeface="Calibri"/>
+                <a:ea typeface="Calibri"/>
+                <a:cs typeface="Calibri"/>
+              </a:rPr>
+              <a:t> = I² · R; P</a:t>
             </a:r>
             <a:r>
               <a:rPr sz="2400" b="1" baseline="-25000">
@@ -16769,7 +16861,18 @@
                 <a:ea typeface="Calibri"/>
                 <a:cs typeface="Calibri"/>
               </a:rPr>
-              <a:t>η = Pᵤₜ / Pᵢₙ</a:t>
+              <a:t>η = Pᵤₜ / P</a:t>
+            </a:r>
+            <a:r>
+              <a:rPr sz="2925" b="1" baseline="-25000">
+                <a:solidFill>
+                  <a:srgbClr val="064F91"/>
+                </a:solidFill>
+                <a:latin typeface="Calibri"/>
+                <a:ea typeface="Calibri"/>
+                <a:cs typeface="Calibri"/>
+              </a:rPr>
+              <a:t>in</a:t>
             </a:r>
           </a:p>
         </p:txBody>
@@ -17126,7 +17229,29 @@
                 <a:ea typeface="Calibri"/>
                 <a:cs typeface="Calibri"/>
               </a:rPr>
-              <a:t>Pᵢₙ = Pᵤₜ/η     E = Pᵢₙt</a:t>
+              <a:t>P</a:t>
+            </a:r>
+            <a:r>
+              <a:rPr sz="2325" b="1" baseline="-25000">
+                <a:solidFill>
+                  <a:srgbClr val="064F91"/>
+                </a:solidFill>
+                <a:latin typeface="Calibri"/>
+                <a:ea typeface="Calibri"/>
+                <a:cs typeface="Calibri"/>
+              </a:rPr>
+              <a:t>in</a:t>
+            </a:r>
+            <a:r>
+              <a:rPr sz="2325" b="1">
+                <a:solidFill>
+                  <a:srgbClr val="064F91"/>
+                </a:solidFill>
+                <a:latin typeface="Calibri"/>
+                <a:ea typeface="Calibri"/>
+                <a:cs typeface="Calibri"/>
+              </a:rPr>
+              <a:t> = Pᵤₜ/η     E = Pᵢₙt</a:t>
             </a:r>
           </a:p>
         </p:txBody>
@@ -17206,7 +17331,29 @@
                 <a:ea typeface="Calibri"/>
                 <a:cs typeface="Calibri"/>
               </a:rPr>
-              <a:t>2. Pᵢₙ = 240/0,60 = 400 W = 0,400 kW.</a:t>
+              <a:t>2. P</a:t>
+            </a:r>
+            <a:r>
+              <a:rPr sz="2063" b="0" baseline="-25000">
+                <a:solidFill>
+                  <a:srgbClr val="111111"/>
+                </a:solidFill>
+                <a:latin typeface="Calibri"/>
+                <a:ea typeface="Calibri"/>
+                <a:cs typeface="Calibri"/>
+              </a:rPr>
+              <a:t>in</a:t>
+            </a:r>
+            <a:r>
+              <a:rPr sz="2063" b="0">
+                <a:solidFill>
+                  <a:srgbClr val="111111"/>
+                </a:solidFill>
+                <a:latin typeface="Calibri"/>
+                <a:ea typeface="Calibri"/>
+                <a:cs typeface="Calibri"/>
+              </a:rPr>
+              <a:t> = 240/0,60 = 400 W = 0,400 kW.</a:t>
             </a:r>
           </a:p>
           <a:p xmlns:a="http://schemas.openxmlformats.org/drawingml/2006/main">
